--- a/deck/B_FreshBox_The_Proposal.pptx
+++ b/deck/B_FreshBox_The_Proposal.pptx
@@ -215,7 +215,7 @@
           <a:p>
             <a:fld id="{3EB9B450-CE3A-4A96-82F3-6345A01A9888}" type="datetimeFigureOut">
               <a:rPr lang="en-GB" smtClean="0"/>
-              <a:t>27/04/2026</a:t>
+              <a:t>28/04/2026</a:t>
             </a:fld>
             <a:endParaRPr lang="en-GB"/>
           </a:p>
@@ -2232,7 +2232,7 @@
                 <a:ea typeface="Calibri" pitchFamily="34" charset="-122"/>
                 <a:cs typeface="Calibri" pitchFamily="34" charset="-120"/>
               </a:rPr>
-              <a:t>£80-120K</a:t>
+              <a:t>£0.8m</a:t>
             </a:r>
             <a:endParaRPr lang="en-US" sz="2400" dirty="0"/>
           </a:p>
